--- a/FinML/Course-project/Course project.pptx
+++ b/FinML/Course-project/Course project.pptx
@@ -130,7 +130,7 @@
           <a:p>
             <a:fld id="{CED1C788-56A1-2E45-A024-5C42A74F7F0E}" type="datetimeFigureOut">
               <a:rPr lang="en-US" smtClean="0"/>
-              <a:t>12/3/24</a:t>
+              <a:t>3/10/25</a:t>
             </a:fld>
             <a:endParaRPr lang="en-US"/>
           </a:p>
@@ -1990,7 +1990,7 @@
           <a:p>
             <a:fld id="{1D8BD707-D9CF-40AE-B4C6-C98DA3205C09}" type="datetimeFigureOut">
               <a:rPr lang="en-US"/>
-              <a:t>12/3/24</a:t>
+              <a:t>3/10/25</a:t>
             </a:fld>
             <a:endParaRPr lang="en-US"/>
           </a:p>
@@ -2167,7 +2167,7 @@
           <a:p>
             <a:fld id="{1D8BD707-D9CF-40AE-B4C6-C98DA3205C09}" type="datetimeFigureOut">
               <a:rPr lang="en-US"/>
-              <a:t>12/3/24</a:t>
+              <a:t>3/10/25</a:t>
             </a:fld>
             <a:endParaRPr lang="en-US"/>
           </a:p>
@@ -2393,7 +2393,7 @@
           <a:p>
             <a:fld id="{1D8BD707-D9CF-40AE-B4C6-C98DA3205C09}" type="datetimeFigureOut">
               <a:rPr lang="en-US"/>
-              <a:t>12/3/24</a:t>
+              <a:t>3/10/25</a:t>
             </a:fld>
             <a:endParaRPr lang="en-US"/>
           </a:p>
@@ -2571,7 +2571,7 @@
           <a:p>
             <a:fld id="{1D8BD707-D9CF-40AE-B4C6-C98DA3205C09}" type="datetimeFigureOut">
               <a:rPr lang="en-US"/>
-              <a:t>12/3/24</a:t>
+              <a:t>3/10/25</a:t>
             </a:fld>
             <a:endParaRPr lang="en-US"/>
           </a:p>
@@ -2690,7 +2690,7 @@
           <a:p>
             <a:fld id="{1D8BD707-D9CF-40AE-B4C6-C98DA3205C09}" type="datetimeFigureOut">
               <a:rPr lang="en-US"/>
-              <a:t>12/3/24</a:t>
+              <a:t>3/10/25</a:t>
             </a:fld>
             <a:endParaRPr lang="en-US"/>
           </a:p>
@@ -4842,7 +4842,7 @@
           <a:p>
             <a:fld id="{1D8BD707-D9CF-40AE-B4C6-C98DA3205C09}" type="datetimeFigureOut">
               <a:rPr lang="en-US"/>
-              <a:t>12/3/24</a:t>
+              <a:t>3/10/25</a:t>
             </a:fld>
             <a:endParaRPr lang="en-US"/>
           </a:p>
@@ -5279,11 +5279,11 @@
               </a:spcBef>
             </a:pPr>
             <a:r>
-              <a:rPr lang="ru-RU" sz="1400" dirty="0">
+              <a:rPr lang="en-US" sz="1400" dirty="0">
                 <a:latin typeface="Calibri"/>
                 <a:cs typeface="Calibri"/>
               </a:rPr>
-              <a:t>03</a:t>
+              <a:t>10</a:t>
             </a:r>
             <a:r>
               <a:rPr sz="1400" dirty="0">
@@ -5297,7 +5297,7 @@
                 <a:latin typeface="Calibri"/>
                 <a:cs typeface="Calibri"/>
               </a:rPr>
-              <a:t>12</a:t>
+              <a:t>03</a:t>
             </a:r>
             <a:r>
               <a:rPr sz="1400" spc="-40" dirty="0">
@@ -5360,14 +5360,7 @@
                 <a:latin typeface="Calibri"/>
                 <a:cs typeface="Calibri"/>
               </a:rPr>
-              <a:t>0</a:t>
-            </a:r>
-            <a:r>
-              <a:rPr lang="ru-RU" sz="1400" dirty="0">
-                <a:latin typeface="Calibri"/>
-                <a:cs typeface="Calibri"/>
-              </a:rPr>
-              <a:t>4</a:t>
+              <a:t>05</a:t>
             </a:r>
             <a:r>
               <a:rPr sz="1400" dirty="0">
@@ -5381,14 +5374,7 @@
                 <a:latin typeface="Calibri"/>
                 <a:cs typeface="Calibri"/>
               </a:rPr>
-              <a:t>0</a:t>
-            </a:r>
-            <a:r>
-              <a:rPr lang="ru-RU" sz="1400" dirty="0">
-                <a:latin typeface="Calibri"/>
-                <a:cs typeface="Calibri"/>
-              </a:rPr>
-              <a:t>2</a:t>
+              <a:t>04</a:t>
             </a:r>
             <a:r>
               <a:rPr sz="1400" spc="-35" dirty="0">
@@ -6281,11 +6267,11 @@
               </a:spcBef>
             </a:pPr>
             <a:r>
-              <a:rPr lang="ru-RU" sz="1400" dirty="0">
+              <a:rPr lang="en-US" sz="1400" dirty="0">
                 <a:latin typeface="Calibri"/>
                 <a:cs typeface="Calibri"/>
               </a:rPr>
-              <a:t>04</a:t>
+              <a:t>12</a:t>
             </a:r>
             <a:r>
               <a:rPr sz="1400" dirty="0">
@@ -6299,7 +6285,7 @@
                 <a:latin typeface="Calibri"/>
                 <a:cs typeface="Calibri"/>
               </a:rPr>
-              <a:t>12</a:t>
+              <a:t>03</a:t>
             </a:r>
             <a:r>
               <a:rPr sz="1400" spc="-40" dirty="0">
@@ -6316,6 +6302,196 @@
               <a:t>-</a:t>
             </a:r>
             <a:endParaRPr sz="1400" dirty="0">
+              <a:latin typeface="Calibri"/>
+              <a:cs typeface="Calibri"/>
+            </a:endParaRPr>
+          </a:p>
+        </p:txBody>
+      </p:sp>
+      <p:sp>
+        <p:nvSpPr>
+          <p:cNvPr id="21" name="object 20">
+            <a:extLst>
+              <a:ext uri="{FF2B5EF4-FFF2-40B4-BE49-F238E27FC236}">
+                <a16:creationId xmlns:a16="http://schemas.microsoft.com/office/drawing/2014/main" id="{553DAF47-5CB3-5746-BEF8-F576501F4A23}"/>
+              </a:ext>
+            </a:extLst>
+          </p:cNvPr>
+          <p:cNvSpPr txBox="1"/>
+          <p:nvPr/>
+        </p:nvSpPr>
+        <p:spPr>
+          <a:xfrm>
+            <a:off x="1233718" y="2927937"/>
+            <a:ext cx="526415" cy="228268"/>
+          </a:xfrm>
+          <a:prstGeom prst="rect">
+            <a:avLst/>
+          </a:prstGeom>
+        </p:spPr>
+        <p:txBody>
+          <a:bodyPr vert="horz" wrap="square" lIns="0" tIns="12700" rIns="0" bIns="0" rtlCol="0">
+            <a:spAutoFit/>
+          </a:bodyPr>
+          <a:lstStyle/>
+          <a:p>
+            <a:pPr marL="12700">
+              <a:lnSpc>
+                <a:spcPct val="100000"/>
+              </a:lnSpc>
+              <a:spcBef>
+                <a:spcPts val="100"/>
+              </a:spcBef>
+            </a:pPr>
+            <a:r>
+              <a:rPr lang="en-US" sz="1400" b="1" dirty="0">
+                <a:solidFill>
+                  <a:srgbClr val="FF0000"/>
+                </a:solidFill>
+                <a:latin typeface="Calibri"/>
+                <a:cs typeface="Calibri"/>
+              </a:rPr>
+              <a:t>01</a:t>
+            </a:r>
+            <a:r>
+              <a:rPr sz="1400" b="1" dirty="0">
+                <a:solidFill>
+                  <a:srgbClr val="FF0000"/>
+                </a:solidFill>
+                <a:latin typeface="Calibri"/>
+                <a:cs typeface="Calibri"/>
+              </a:rPr>
+              <a:t>.</a:t>
+            </a:r>
+            <a:r>
+              <a:rPr lang="en-US" sz="1400" b="1" dirty="0">
+                <a:solidFill>
+                  <a:srgbClr val="FF0000"/>
+                </a:solidFill>
+                <a:latin typeface="Calibri"/>
+                <a:cs typeface="Calibri"/>
+              </a:rPr>
+              <a:t>04</a:t>
+            </a:r>
+            <a:r>
+              <a:rPr sz="1400" b="1" spc="-40" dirty="0">
+                <a:solidFill>
+                  <a:srgbClr val="FF0000"/>
+                </a:solidFill>
+                <a:latin typeface="Calibri"/>
+                <a:cs typeface="Calibri"/>
+              </a:rPr>
+              <a:t> </a:t>
+            </a:r>
+            <a:r>
+              <a:rPr sz="1400" b="1" spc="-50" dirty="0">
+                <a:solidFill>
+                  <a:srgbClr val="FF0000"/>
+                </a:solidFill>
+                <a:latin typeface="Calibri"/>
+                <a:cs typeface="Calibri"/>
+              </a:rPr>
+              <a:t>-</a:t>
+            </a:r>
+            <a:endParaRPr sz="1400" b="1" dirty="0">
+              <a:solidFill>
+                <a:srgbClr val="FF0000"/>
+              </a:solidFill>
+              <a:latin typeface="Calibri"/>
+              <a:cs typeface="Calibri"/>
+            </a:endParaRPr>
+          </a:p>
+        </p:txBody>
+      </p:sp>
+      <p:sp>
+        <p:nvSpPr>
+          <p:cNvPr id="22" name="object 20">
+            <a:extLst>
+              <a:ext uri="{FF2B5EF4-FFF2-40B4-BE49-F238E27FC236}">
+                <a16:creationId xmlns:a16="http://schemas.microsoft.com/office/drawing/2014/main" id="{84A34ED1-CCAE-B34E-9C32-8CF19829437D}"/>
+              </a:ext>
+            </a:extLst>
+          </p:cNvPr>
+          <p:cNvSpPr txBox="1"/>
+          <p:nvPr/>
+        </p:nvSpPr>
+        <p:spPr>
+          <a:xfrm>
+            <a:off x="1233717" y="3434129"/>
+            <a:ext cx="526415" cy="228268"/>
+          </a:xfrm>
+          <a:prstGeom prst="rect">
+            <a:avLst/>
+          </a:prstGeom>
+        </p:spPr>
+        <p:txBody>
+          <a:bodyPr vert="horz" wrap="square" lIns="0" tIns="12700" rIns="0" bIns="0" rtlCol="0">
+            <a:spAutoFit/>
+          </a:bodyPr>
+          <a:lstStyle/>
+          <a:p>
+            <a:pPr marL="12700">
+              <a:lnSpc>
+                <a:spcPct val="100000"/>
+              </a:lnSpc>
+              <a:spcBef>
+                <a:spcPts val="100"/>
+              </a:spcBef>
+            </a:pPr>
+            <a:r>
+              <a:rPr lang="en-US" sz="1400" b="1" dirty="0">
+                <a:solidFill>
+                  <a:srgbClr val="FF0000"/>
+                </a:solidFill>
+                <a:latin typeface="Calibri"/>
+                <a:cs typeface="Calibri"/>
+              </a:rPr>
+              <a:t>24</a:t>
+            </a:r>
+            <a:r>
+              <a:rPr sz="1400" b="1" dirty="0">
+                <a:solidFill>
+                  <a:srgbClr val="FF0000"/>
+                </a:solidFill>
+                <a:latin typeface="Calibri"/>
+                <a:cs typeface="Calibri"/>
+              </a:rPr>
+              <a:t>.</a:t>
+            </a:r>
+            <a:r>
+              <a:rPr lang="en-US" sz="1400" b="1" dirty="0">
+                <a:solidFill>
+                  <a:srgbClr val="FF0000"/>
+                </a:solidFill>
+                <a:latin typeface="Calibri"/>
+                <a:cs typeface="Calibri"/>
+              </a:rPr>
+              <a:t>04</a:t>
+            </a:r>
+            <a:r>
+              <a:rPr sz="1400" b="1" spc="-40" dirty="0">
+                <a:solidFill>
+                  <a:srgbClr val="FF0000"/>
+                </a:solidFill>
+                <a:latin typeface="Calibri"/>
+                <a:cs typeface="Calibri"/>
+              </a:rPr>
+              <a:t> </a:t>
+            </a:r>
+            <a:r>
+              <a:rPr sz="1400" b="1" spc="-50" dirty="0">
+                <a:solidFill>
+                  <a:srgbClr val="FF0000"/>
+                </a:solidFill>
+                <a:latin typeface="Calibri"/>
+                <a:cs typeface="Calibri"/>
+              </a:rPr>
+              <a:t>-</a:t>
+            </a:r>
+            <a:endParaRPr sz="1400" b="1" dirty="0">
+              <a:solidFill>
+                <a:srgbClr val="FF0000"/>
+              </a:solidFill>
               <a:latin typeface="Calibri"/>
               <a:cs typeface="Calibri"/>
             </a:endParaRPr>
@@ -12653,7 +12829,7 @@
                   <a:srgbClr val="1E1F21"/>
                 </a:solidFill>
               </a:rPr>
-              <a:t>Формат сдачи – презентация (+ ссылка на </a:t>
+              <a:t>Формат сдачи – презентация</a:t>
             </a:r>
             <a:r>
               <a:rPr lang="en-US" sz="1400" b="0" dirty="0">
@@ -12661,6 +12837,29 @@
                   <a:srgbClr val="1E1F21"/>
                 </a:solidFill>
               </a:rPr>
+              <a:t>;</a:t>
+            </a:r>
+            <a:br>
+              <a:rPr lang="en-US" sz="1400" b="0" dirty="0">
+                <a:solidFill>
+                  <a:srgbClr val="1E1F21"/>
+                </a:solidFill>
+              </a:rPr>
+            </a:br>
+            <a:r>
+              <a:rPr lang="ru-RU" sz="1400" b="0" dirty="0">
+                <a:solidFill>
+                  <a:srgbClr val="1E1F21"/>
+                </a:solidFill>
+              </a:rPr>
+              <a:t>ссылка на </a:t>
+            </a:r>
+            <a:r>
+              <a:rPr lang="en-US" sz="1400" b="0" dirty="0">
+                <a:solidFill>
+                  <a:srgbClr val="1E1F21"/>
+                </a:solidFill>
+              </a:rPr>
               <a:t>git </a:t>
             </a:r>
             <a:r>
@@ -12669,7 +12868,7 @@
                   <a:srgbClr val="1E1F21"/>
                 </a:solidFill>
               </a:rPr>
-              <a:t>репозиторий) – опционально.</a:t>
+              <a:t>репозиторий – опционально.</a:t>
             </a:r>
             <a:endParaRPr sz="1400" b="0" dirty="0">
               <a:solidFill>

--- a/FinML/Course-project/Course project.pptx
+++ b/FinML/Course-project/Course project.pptx
@@ -130,7 +130,7 @@
           <a:p>
             <a:fld id="{CED1C788-56A1-2E45-A024-5C42A74F7F0E}" type="datetimeFigureOut">
               <a:rPr lang="en-US" smtClean="0"/>
-              <a:t>3/10/25</a:t>
+              <a:t>5/29/25</a:t>
             </a:fld>
             <a:endParaRPr lang="en-US"/>
           </a:p>
@@ -1990,7 +1990,7 @@
           <a:p>
             <a:fld id="{1D8BD707-D9CF-40AE-B4C6-C98DA3205C09}" type="datetimeFigureOut">
               <a:rPr lang="en-US"/>
-              <a:t>3/10/25</a:t>
+              <a:t>5/29/25</a:t>
             </a:fld>
             <a:endParaRPr lang="en-US"/>
           </a:p>
@@ -2167,7 +2167,7 @@
           <a:p>
             <a:fld id="{1D8BD707-D9CF-40AE-B4C6-C98DA3205C09}" type="datetimeFigureOut">
               <a:rPr lang="en-US"/>
-              <a:t>3/10/25</a:t>
+              <a:t>5/29/25</a:t>
             </a:fld>
             <a:endParaRPr lang="en-US"/>
           </a:p>
@@ -2393,7 +2393,7 @@
           <a:p>
             <a:fld id="{1D8BD707-D9CF-40AE-B4C6-C98DA3205C09}" type="datetimeFigureOut">
               <a:rPr lang="en-US"/>
-              <a:t>3/10/25</a:t>
+              <a:t>5/29/25</a:t>
             </a:fld>
             <a:endParaRPr lang="en-US"/>
           </a:p>
@@ -2571,7 +2571,7 @@
           <a:p>
             <a:fld id="{1D8BD707-D9CF-40AE-B4C6-C98DA3205C09}" type="datetimeFigureOut">
               <a:rPr lang="en-US"/>
-              <a:t>3/10/25</a:t>
+              <a:t>5/29/25</a:t>
             </a:fld>
             <a:endParaRPr lang="en-US"/>
           </a:p>
@@ -2690,7 +2690,7 @@
           <a:p>
             <a:fld id="{1D8BD707-D9CF-40AE-B4C6-C98DA3205C09}" type="datetimeFigureOut">
               <a:rPr lang="en-US"/>
-              <a:t>3/10/25</a:t>
+              <a:t>5/29/25</a:t>
             </a:fld>
             <a:endParaRPr lang="en-US"/>
           </a:p>
@@ -4842,7 +4842,7 @@
           <a:p>
             <a:fld id="{1D8BD707-D9CF-40AE-B4C6-C98DA3205C09}" type="datetimeFigureOut">
               <a:rPr lang="en-US"/>
-              <a:t>3/10/25</a:t>
+              <a:t>5/29/25</a:t>
             </a:fld>
             <a:endParaRPr lang="en-US"/>
           </a:p>
@@ -5279,25 +5279,32 @@
               </a:spcBef>
             </a:pPr>
             <a:r>
+              <a:rPr lang="ru-RU" sz="1400" dirty="0">
+                <a:latin typeface="Calibri"/>
+                <a:cs typeface="Calibri"/>
+              </a:rPr>
+              <a:t>29</a:t>
+            </a:r>
+            <a:r>
+              <a:rPr sz="1400" dirty="0">
+                <a:latin typeface="Calibri"/>
+                <a:cs typeface="Calibri"/>
+              </a:rPr>
+              <a:t>.</a:t>
+            </a:r>
+            <a:r>
               <a:rPr lang="en-US" sz="1400" dirty="0">
                 <a:latin typeface="Calibri"/>
                 <a:cs typeface="Calibri"/>
               </a:rPr>
-              <a:t>10</a:t>
-            </a:r>
-            <a:r>
-              <a:rPr sz="1400" dirty="0">
+              <a:t>0</a:t>
+            </a:r>
+            <a:r>
+              <a:rPr lang="ru-RU" sz="1400" dirty="0">
                 <a:latin typeface="Calibri"/>
                 <a:cs typeface="Calibri"/>
               </a:rPr>
-              <a:t>.</a:t>
-            </a:r>
-            <a:r>
-              <a:rPr lang="en-US" sz="1400" dirty="0">
-                <a:latin typeface="Calibri"/>
-                <a:cs typeface="Calibri"/>
-              </a:rPr>
-              <a:t>03</a:t>
+              <a:t>5</a:t>
             </a:r>
             <a:r>
               <a:rPr sz="1400" spc="-40" dirty="0">
@@ -5356,25 +5363,32 @@
               </a:spcBef>
             </a:pPr>
             <a:r>
+              <a:rPr lang="ru-RU" sz="1400" dirty="0">
+                <a:latin typeface="Calibri"/>
+                <a:cs typeface="Calibri"/>
+              </a:rPr>
+              <a:t>27</a:t>
+            </a:r>
+            <a:r>
+              <a:rPr sz="1400" dirty="0">
+                <a:latin typeface="Calibri"/>
+                <a:cs typeface="Calibri"/>
+              </a:rPr>
+              <a:t>.</a:t>
+            </a:r>
+            <a:r>
               <a:rPr lang="en-US" sz="1400" dirty="0">
                 <a:latin typeface="Calibri"/>
                 <a:cs typeface="Calibri"/>
               </a:rPr>
-              <a:t>05</a:t>
-            </a:r>
-            <a:r>
-              <a:rPr sz="1400" dirty="0">
+              <a:t>0</a:t>
+            </a:r>
+            <a:r>
+              <a:rPr lang="ru-RU" sz="1400" dirty="0">
                 <a:latin typeface="Calibri"/>
                 <a:cs typeface="Calibri"/>
               </a:rPr>
-              <a:t>.</a:t>
-            </a:r>
-            <a:r>
-              <a:rPr lang="en-US" sz="1400" dirty="0">
-                <a:latin typeface="Calibri"/>
-                <a:cs typeface="Calibri"/>
-              </a:rPr>
-              <a:t>04</a:t>
+              <a:t>6</a:t>
             </a:r>
             <a:r>
               <a:rPr sz="1400" spc="-35" dirty="0">
@@ -5924,211 +5938,6 @@
           </a:fontRef>
         </p:style>
       </p:cxnSp>
-      <p:graphicFrame>
-        <p:nvGraphicFramePr>
-          <p:cNvPr id="24" name="Table 23">
-            <a:extLst>
-              <a:ext uri="{FF2B5EF4-FFF2-40B4-BE49-F238E27FC236}">
-                <a16:creationId xmlns:a16="http://schemas.microsoft.com/office/drawing/2014/main" id="{548FFE73-08C7-6147-B60A-390BA5C5E546}"/>
-              </a:ext>
-            </a:extLst>
-          </p:cNvPr>
-          <p:cNvGraphicFramePr>
-            <a:graphicFrameLocks noGrp="1"/>
-          </p:cNvGraphicFramePr>
-          <p:nvPr>
-            <p:extLst>
-              <p:ext uri="{D42A27DB-BD31-4B8C-83A1-F6EECF244321}">
-                <p14:modId xmlns:p14="http://schemas.microsoft.com/office/powerpoint/2010/main" val="4226505594"/>
-              </p:ext>
-            </p:extLst>
-          </p:nvPr>
-        </p:nvGraphicFramePr>
-        <p:xfrm>
-          <a:off x="5355768" y="573874"/>
-          <a:ext cx="2226910" cy="365760"/>
-        </p:xfrm>
-        <a:graphic>
-          <a:graphicData uri="http://schemas.openxmlformats.org/drawingml/2006/table">
-            <a:tbl>
-              <a:tblPr firstRow="1" bandRow="1"/>
-              <a:tblGrid>
-                <a:gridCol w="445382">
-                  <a:extLst>
-                    <a:ext uri="{9D8B030D-6E8A-4147-A177-3AD203B41FA5}">
-                      <a16:colId xmlns:a16="http://schemas.microsoft.com/office/drawing/2014/main" val="884960188"/>
-                    </a:ext>
-                  </a:extLst>
-                </a:gridCol>
-                <a:gridCol w="445382">
-                  <a:extLst>
-                    <a:ext uri="{9D8B030D-6E8A-4147-A177-3AD203B41FA5}">
-                      <a16:colId xmlns:a16="http://schemas.microsoft.com/office/drawing/2014/main" val="1334008315"/>
-                    </a:ext>
-                  </a:extLst>
-                </a:gridCol>
-                <a:gridCol w="445382">
-                  <a:extLst>
-                    <a:ext uri="{9D8B030D-6E8A-4147-A177-3AD203B41FA5}">
-                      <a16:colId xmlns:a16="http://schemas.microsoft.com/office/drawing/2014/main" val="3209860974"/>
-                    </a:ext>
-                  </a:extLst>
-                </a:gridCol>
-                <a:gridCol w="445382">
-                  <a:extLst>
-                    <a:ext uri="{9D8B030D-6E8A-4147-A177-3AD203B41FA5}">
-                      <a16:colId xmlns:a16="http://schemas.microsoft.com/office/drawing/2014/main" val="4238538779"/>
-                    </a:ext>
-                  </a:extLst>
-                </a:gridCol>
-                <a:gridCol w="445382">
-                  <a:extLst>
-                    <a:ext uri="{9D8B030D-6E8A-4147-A177-3AD203B41FA5}">
-                      <a16:colId xmlns:a16="http://schemas.microsoft.com/office/drawing/2014/main" val="4263781807"/>
-                    </a:ext>
-                  </a:extLst>
-                </a:gridCol>
-              </a:tblGrid>
-              <a:tr h="250242">
-                <a:tc>
-                  <a:txBody>
-                    <a:bodyPr/>
-                    <a:lstStyle/>
-                    <a:p>
-                      <a:pPr algn="ctr"/>
-                      <a:r>
-                        <a:rPr lang="en-US" dirty="0">
-                          <a:solidFill>
-                            <a:schemeClr val="tx1">
-                              <a:lumMod val="50000"/>
-                              <a:lumOff val="50000"/>
-                            </a:schemeClr>
-                          </a:solidFill>
-                        </a:rPr>
-                        <a:t>1</a:t>
-                      </a:r>
-                    </a:p>
-                  </a:txBody>
-                  <a:tcPr>
-                    <a:solidFill>
-                      <a:schemeClr val="bg1">
-                        <a:lumMod val="85000"/>
-                      </a:schemeClr>
-                    </a:solidFill>
-                  </a:tcPr>
-                </a:tc>
-                <a:tc>
-                  <a:txBody>
-                    <a:bodyPr/>
-                    <a:lstStyle/>
-                    <a:p>
-                      <a:pPr algn="ctr"/>
-                      <a:r>
-                        <a:rPr lang="en-US" dirty="0">
-                          <a:solidFill>
-                            <a:schemeClr val="tx1">
-                              <a:lumMod val="50000"/>
-                              <a:lumOff val="50000"/>
-                            </a:schemeClr>
-                          </a:solidFill>
-                        </a:rPr>
-                        <a:t>2</a:t>
-                      </a:r>
-                    </a:p>
-                  </a:txBody>
-                  <a:tcPr>
-                    <a:solidFill>
-                      <a:schemeClr val="bg1">
-                        <a:lumMod val="85000"/>
-                      </a:schemeClr>
-                    </a:solidFill>
-                  </a:tcPr>
-                </a:tc>
-                <a:tc>
-                  <a:txBody>
-                    <a:bodyPr/>
-                    <a:lstStyle/>
-                    <a:p>
-                      <a:pPr algn="ctr"/>
-                      <a:r>
-                        <a:rPr lang="en-US" dirty="0">
-                          <a:solidFill>
-                            <a:schemeClr val="tx1">
-                              <a:lumMod val="50000"/>
-                              <a:lumOff val="50000"/>
-                            </a:schemeClr>
-                          </a:solidFill>
-                        </a:rPr>
-                        <a:t>3</a:t>
-                      </a:r>
-                    </a:p>
-                  </a:txBody>
-                  <a:tcPr>
-                    <a:solidFill>
-                      <a:schemeClr val="bg1">
-                        <a:lumMod val="85000"/>
-                      </a:schemeClr>
-                    </a:solidFill>
-                  </a:tcPr>
-                </a:tc>
-                <a:tc>
-                  <a:txBody>
-                    <a:bodyPr/>
-                    <a:lstStyle/>
-                    <a:p>
-                      <a:pPr algn="ctr"/>
-                      <a:r>
-                        <a:rPr lang="en-US" dirty="0">
-                          <a:solidFill>
-                            <a:schemeClr val="tx1">
-                              <a:lumMod val="50000"/>
-                              <a:lumOff val="50000"/>
-                            </a:schemeClr>
-                          </a:solidFill>
-                        </a:rPr>
-                        <a:t>4</a:t>
-                      </a:r>
-                    </a:p>
-                  </a:txBody>
-                  <a:tcPr>
-                    <a:solidFill>
-                      <a:schemeClr val="bg1">
-                        <a:lumMod val="85000"/>
-                      </a:schemeClr>
-                    </a:solidFill>
-                  </a:tcPr>
-                </a:tc>
-                <a:tc>
-                  <a:txBody>
-                    <a:bodyPr/>
-                    <a:lstStyle/>
-                    <a:p>
-                      <a:pPr algn="ctr"/>
-                      <a:r>
-                        <a:rPr lang="en-US" dirty="0"/>
-                        <a:t>5</a:t>
-                      </a:r>
-                    </a:p>
-                  </a:txBody>
-                  <a:tcPr>
-                    <a:solidFill>
-                      <a:schemeClr val="tx2">
-                        <a:lumMod val="20000"/>
-                        <a:lumOff val="80000"/>
-                      </a:schemeClr>
-                    </a:solidFill>
-                  </a:tcPr>
-                </a:tc>
-                <a:extLst>
-                  <a:ext uri="{0D108BD9-81ED-4DB2-BD59-A6C34878D82A}">
-                    <a16:rowId xmlns:a16="http://schemas.microsoft.com/office/drawing/2014/main" val="97753204"/>
-                  </a:ext>
-                </a:extLst>
-              </a:tr>
-            </a:tbl>
-          </a:graphicData>
-        </a:graphic>
-      </p:graphicFrame>
       <p:sp>
         <p:nvSpPr>
           <p:cNvPr id="30" name="Rounded Rectangle 29">
@@ -6267,25 +6076,32 @@
               </a:spcBef>
             </a:pPr>
             <a:r>
+              <a:rPr lang="ru-RU" sz="1400" dirty="0">
+                <a:latin typeface="Calibri"/>
+                <a:cs typeface="Calibri"/>
+              </a:rPr>
+              <a:t>03</a:t>
+            </a:r>
+            <a:r>
+              <a:rPr sz="1400" dirty="0">
+                <a:latin typeface="Calibri"/>
+                <a:cs typeface="Calibri"/>
+              </a:rPr>
+              <a:t>.</a:t>
+            </a:r>
+            <a:r>
               <a:rPr lang="en-US" sz="1400" dirty="0">
                 <a:latin typeface="Calibri"/>
                 <a:cs typeface="Calibri"/>
               </a:rPr>
-              <a:t>12</a:t>
-            </a:r>
-            <a:r>
-              <a:rPr sz="1400" dirty="0">
+              <a:t>0</a:t>
+            </a:r>
+            <a:r>
+              <a:rPr lang="ru-RU" sz="1400" dirty="0">
                 <a:latin typeface="Calibri"/>
                 <a:cs typeface="Calibri"/>
               </a:rPr>
-              <a:t>.</a:t>
-            </a:r>
-            <a:r>
-              <a:rPr lang="en-US" sz="1400" dirty="0">
-                <a:latin typeface="Calibri"/>
-                <a:cs typeface="Calibri"/>
-              </a:rPr>
-              <a:t>03</a:t>
+              <a:t>6</a:t>
             </a:r>
             <a:r>
               <a:rPr sz="1400" spc="-40" dirty="0">
@@ -6323,7 +6139,7 @@
         <p:spPr>
           <a:xfrm>
             <a:off x="1233718" y="2927937"/>
-            <a:ext cx="526415" cy="228268"/>
+            <a:ext cx="652066" cy="228268"/>
           </a:xfrm>
           <a:prstGeom prst="rect">
             <a:avLst/>
@@ -6344,14 +6160,14 @@
               </a:spcBef>
             </a:pPr>
             <a:r>
-              <a:rPr lang="en-US" sz="1400" b="1" dirty="0">
+              <a:rPr lang="ru-RU" sz="1400" b="1" dirty="0">
                 <a:solidFill>
                   <a:srgbClr val="FF0000"/>
                 </a:solidFill>
                 <a:latin typeface="Calibri"/>
                 <a:cs typeface="Calibri"/>
               </a:rPr>
-              <a:t>01</a:t>
+              <a:t>19</a:t>
             </a:r>
             <a:r>
               <a:rPr sz="1400" b="1" dirty="0">
@@ -6371,27 +6187,47 @@
                 <a:latin typeface="Calibri"/>
                 <a:cs typeface="Calibri"/>
               </a:rPr>
-              <a:t>04</a:t>
-            </a:r>
-            <a:r>
-              <a:rPr sz="1400" b="1" spc="-40" dirty="0">
+              <a:t>0</a:t>
+            </a:r>
+            <a:r>
+              <a:rPr lang="ru-RU" sz="1400" b="1" dirty="0">
                 <a:solidFill>
                   <a:srgbClr val="FF0000"/>
                 </a:solidFill>
                 <a:latin typeface="Calibri"/>
                 <a:cs typeface="Calibri"/>
               </a:rPr>
-              <a:t> </a:t>
-            </a:r>
-            <a:r>
-              <a:rPr sz="1400" b="1" spc="-50" dirty="0">
+              <a:t>6</a:t>
+            </a:r>
+            <a:r>
+              <a:rPr sz="1400" b="1" spc="-40" dirty="0">
                 <a:solidFill>
                   <a:srgbClr val="FF0000"/>
                 </a:solidFill>
                 <a:latin typeface="Calibri"/>
                 <a:cs typeface="Calibri"/>
               </a:rPr>
+              <a:t> </a:t>
+            </a:r>
+            <a:r>
+              <a:rPr sz="1400" b="1" spc="-50" dirty="0">
+                <a:solidFill>
+                  <a:srgbClr val="FF0000"/>
+                </a:solidFill>
+                <a:latin typeface="Calibri"/>
+                <a:cs typeface="Calibri"/>
+              </a:rPr>
               <a:t>-</a:t>
+            </a:r>
+            <a:r>
+              <a:rPr lang="ru-RU" sz="1400" b="1" spc="-50" dirty="0">
+                <a:solidFill>
+                  <a:srgbClr val="FF0000"/>
+                </a:solidFill>
+                <a:latin typeface="Calibri"/>
+                <a:cs typeface="Calibri"/>
+              </a:rPr>
+              <a:t> ?</a:t>
             </a:r>
             <a:endParaRPr sz="1400" b="1" dirty="0">
               <a:solidFill>
@@ -6418,7 +6254,7 @@
         <p:spPr>
           <a:xfrm>
             <a:off x="1233717" y="3434129"/>
-            <a:ext cx="526415" cy="228268"/>
+            <a:ext cx="652066" cy="228268"/>
           </a:xfrm>
           <a:prstGeom prst="rect">
             <a:avLst/>
@@ -6446,47 +6282,77 @@
                 <a:latin typeface="Calibri"/>
                 <a:cs typeface="Calibri"/>
               </a:rPr>
-              <a:t>24</a:t>
-            </a:r>
-            <a:r>
-              <a:rPr sz="1400" b="1" dirty="0">
+              <a:t>2</a:t>
+            </a:r>
+            <a:r>
+              <a:rPr lang="ru-RU" sz="1400" b="1" dirty="0">
                 <a:solidFill>
                   <a:srgbClr val="FF0000"/>
                 </a:solidFill>
                 <a:latin typeface="Calibri"/>
                 <a:cs typeface="Calibri"/>
               </a:rPr>
-              <a:t>.</a:t>
-            </a:r>
-            <a:r>
-              <a:rPr lang="en-US" sz="1400" b="1" dirty="0">
+              <a:t>5</a:t>
+            </a:r>
+            <a:r>
+              <a:rPr sz="1400" b="1" dirty="0">
                 <a:solidFill>
                   <a:srgbClr val="FF0000"/>
                 </a:solidFill>
                 <a:latin typeface="Calibri"/>
                 <a:cs typeface="Calibri"/>
               </a:rPr>
-              <a:t>04</a:t>
-            </a:r>
-            <a:r>
-              <a:rPr sz="1400" b="1" spc="-40" dirty="0">
+              <a:t>.</a:t>
+            </a:r>
+            <a:r>
+              <a:rPr lang="en-US" sz="1400" b="1" dirty="0">
                 <a:solidFill>
                   <a:srgbClr val="FF0000"/>
                 </a:solidFill>
                 <a:latin typeface="Calibri"/>
                 <a:cs typeface="Calibri"/>
               </a:rPr>
-              <a:t> </a:t>
-            </a:r>
-            <a:r>
-              <a:rPr sz="1400" b="1" spc="-50" dirty="0">
+              <a:t>0</a:t>
+            </a:r>
+            <a:r>
+              <a:rPr lang="ru-RU" sz="1400" b="1" dirty="0">
                 <a:solidFill>
                   <a:srgbClr val="FF0000"/>
                 </a:solidFill>
                 <a:latin typeface="Calibri"/>
                 <a:cs typeface="Calibri"/>
               </a:rPr>
+              <a:t>6</a:t>
+            </a:r>
+            <a:r>
+              <a:rPr sz="1400" b="1" spc="-40" dirty="0">
+                <a:solidFill>
+                  <a:srgbClr val="FF0000"/>
+                </a:solidFill>
+                <a:latin typeface="Calibri"/>
+                <a:cs typeface="Calibri"/>
+              </a:rPr>
+              <a:t> </a:t>
+            </a:r>
+            <a:r>
+              <a:rPr sz="1400" b="1" spc="-50" dirty="0">
+                <a:solidFill>
+                  <a:srgbClr val="FF0000"/>
+                </a:solidFill>
+                <a:latin typeface="Calibri"/>
+                <a:cs typeface="Calibri"/>
+              </a:rPr>
               <a:t>-</a:t>
+            </a:r>
+            <a:r>
+              <a:rPr lang="ru-RU" sz="1400" b="1" spc="-50" dirty="0">
+                <a:solidFill>
+                  <a:srgbClr val="FF0000"/>
+                </a:solidFill>
+                <a:latin typeface="Calibri"/>
+                <a:cs typeface="Calibri"/>
+              </a:rPr>
+              <a:t> ?</a:t>
             </a:r>
             <a:endParaRPr sz="1400" b="1" dirty="0">
               <a:solidFill>

--- a/FinML/Course-project/Course project.pptx
+++ b/FinML/Course-project/Course project.pptx
@@ -130,7 +130,7 @@
           <a:p>
             <a:fld id="{CED1C788-56A1-2E45-A024-5C42A74F7F0E}" type="datetimeFigureOut">
               <a:rPr lang="en-US" smtClean="0"/>
-              <a:t>5/29/25</a:t>
+              <a:t>10/2/25</a:t>
             </a:fld>
             <a:endParaRPr lang="en-US"/>
           </a:p>
@@ -1990,7 +1990,7 @@
           <a:p>
             <a:fld id="{1D8BD707-D9CF-40AE-B4C6-C98DA3205C09}" type="datetimeFigureOut">
               <a:rPr lang="en-US"/>
-              <a:t>5/29/25</a:t>
+              <a:t>10/2/25</a:t>
             </a:fld>
             <a:endParaRPr lang="en-US"/>
           </a:p>
@@ -2167,7 +2167,7 @@
           <a:p>
             <a:fld id="{1D8BD707-D9CF-40AE-B4C6-C98DA3205C09}" type="datetimeFigureOut">
               <a:rPr lang="en-US"/>
-              <a:t>5/29/25</a:t>
+              <a:t>10/2/25</a:t>
             </a:fld>
             <a:endParaRPr lang="en-US"/>
           </a:p>
@@ -2393,7 +2393,7 @@
           <a:p>
             <a:fld id="{1D8BD707-D9CF-40AE-B4C6-C98DA3205C09}" type="datetimeFigureOut">
               <a:rPr lang="en-US"/>
-              <a:t>5/29/25</a:t>
+              <a:t>10/2/25</a:t>
             </a:fld>
             <a:endParaRPr lang="en-US"/>
           </a:p>
@@ -2571,7 +2571,7 @@
           <a:p>
             <a:fld id="{1D8BD707-D9CF-40AE-B4C6-C98DA3205C09}" type="datetimeFigureOut">
               <a:rPr lang="en-US"/>
-              <a:t>5/29/25</a:t>
+              <a:t>10/2/25</a:t>
             </a:fld>
             <a:endParaRPr lang="en-US"/>
           </a:p>
@@ -2690,7 +2690,7 @@
           <a:p>
             <a:fld id="{1D8BD707-D9CF-40AE-B4C6-C98DA3205C09}" type="datetimeFigureOut">
               <a:rPr lang="en-US"/>
-              <a:t>5/29/25</a:t>
+              <a:t>10/2/25</a:t>
             </a:fld>
             <a:endParaRPr lang="en-US"/>
           </a:p>
@@ -4842,7 +4842,7 @@
           <a:p>
             <a:fld id="{1D8BD707-D9CF-40AE-B4C6-C98DA3205C09}" type="datetimeFigureOut">
               <a:rPr lang="en-US"/>
-              <a:t>5/29/25</a:t>
+              <a:t>10/2/25</a:t>
             </a:fld>
             <a:endParaRPr lang="en-US"/>
           </a:p>
@@ -5241,7 +5241,7 @@
         </p:blipFill>
         <p:spPr>
           <a:xfrm>
-            <a:off x="5355768" y="3369867"/>
+            <a:off x="5334000" y="3140594"/>
             <a:ext cx="3051175" cy="1752445"/>
           </a:xfrm>
           <a:prstGeom prst="rect">
@@ -5283,7 +5283,7 @@
                 <a:latin typeface="Calibri"/>
                 <a:cs typeface="Calibri"/>
               </a:rPr>
-              <a:t>29</a:t>
+              <a:t>02</a:t>
             </a:r>
             <a:r>
               <a:rPr sz="1400" dirty="0">
@@ -5293,18 +5293,18 @@
               <a:t>.</a:t>
             </a:r>
             <a:r>
+              <a:rPr lang="ru-RU" sz="1400" dirty="0">
+                <a:latin typeface="Calibri"/>
+                <a:cs typeface="Calibri"/>
+              </a:rPr>
+              <a:t>1</a:t>
+            </a:r>
+            <a:r>
               <a:rPr lang="en-US" sz="1400" dirty="0">
                 <a:latin typeface="Calibri"/>
                 <a:cs typeface="Calibri"/>
               </a:rPr>
               <a:t>0</a:t>
-            </a:r>
-            <a:r>
-              <a:rPr lang="ru-RU" sz="1400" dirty="0">
-                <a:latin typeface="Calibri"/>
-                <a:cs typeface="Calibri"/>
-              </a:rPr>
-              <a:t>5</a:t>
             </a:r>
             <a:r>
               <a:rPr sz="1400" spc="-40" dirty="0">
@@ -5367,7 +5367,7 @@
                 <a:latin typeface="Calibri"/>
                 <a:cs typeface="Calibri"/>
               </a:rPr>
-              <a:t>27</a:t>
+              <a:t>02</a:t>
             </a:r>
             <a:r>
               <a:rPr sz="1400" dirty="0">
@@ -5377,18 +5377,11 @@
               <a:t>.</a:t>
             </a:r>
             <a:r>
-              <a:rPr lang="en-US" sz="1400" dirty="0">
-                <a:latin typeface="Calibri"/>
-                <a:cs typeface="Calibri"/>
-              </a:rPr>
-              <a:t>0</a:t>
-            </a:r>
-            <a:r>
               <a:rPr lang="ru-RU" sz="1400" dirty="0">
                 <a:latin typeface="Calibri"/>
                 <a:cs typeface="Calibri"/>
               </a:rPr>
-              <a:t>6</a:t>
+              <a:t>12</a:t>
             </a:r>
             <a:r>
               <a:rPr sz="1400" spc="-35" dirty="0">
@@ -5575,7 +5568,7 @@
         </p:nvSpPr>
         <p:spPr>
           <a:xfrm>
-            <a:off x="2225087" y="3351975"/>
+            <a:off x="2225087" y="3140594"/>
             <a:ext cx="3051175" cy="396240"/>
           </a:xfrm>
           <a:prstGeom prst="roundRect">
@@ -5627,10 +5620,10 @@
       </p:sp>
       <p:sp>
         <p:nvSpPr>
-          <p:cNvPr id="26" name="Rounded Rectangle 25">
+          <p:cNvPr id="27" name="Rounded Rectangle 26">
             <a:extLst>
               <a:ext uri="{FF2B5EF4-FFF2-40B4-BE49-F238E27FC236}">
-                <a16:creationId xmlns:a16="http://schemas.microsoft.com/office/drawing/2014/main" id="{09675E17-BE43-F34E-98F1-0CFEA89B0E2E}"/>
+                <a16:creationId xmlns:a16="http://schemas.microsoft.com/office/drawing/2014/main" id="{612C9734-FC8F-C24C-940E-4BD2B5FA68F3}"/>
               </a:ext>
             </a:extLst>
           </p:cNvPr>
@@ -5639,8 +5632,8 @@
         </p:nvSpPr>
         <p:spPr>
           <a:xfrm>
-            <a:off x="2225088" y="2209806"/>
-            <a:ext cx="5356225" cy="522361"/>
+            <a:off x="2225089" y="1701782"/>
+            <a:ext cx="5356225" cy="396240"/>
           </a:xfrm>
           <a:prstGeom prst="roundRect">
             <a:avLst/>
@@ -5651,6 +5644,14 @@
           <a:ln>
             <a:noFill/>
           </a:ln>
+          <a:effectLst>
+            <a:glow rad="139700">
+              <a:schemeClr val="accent1">
+                <a:satMod val="175000"/>
+                <a:alpha val="40000"/>
+              </a:schemeClr>
+            </a:glow>
+          </a:effectLst>
         </p:spPr>
         <p:style>
           <a:lnRef idx="2">
@@ -5679,89 +5680,6 @@
                   <a:schemeClr val="tx1"/>
                 </a:solidFill>
               </a:rPr>
-              <a:t>Консультация - Работа с реальными данными и создание </a:t>
-            </a:r>
-            <a:r>
-              <a:rPr lang="en-US" sz="1400" dirty="0">
-                <a:solidFill>
-                  <a:schemeClr val="tx1"/>
-                </a:solidFill>
-              </a:rPr>
-              <a:t>ML-</a:t>
-            </a:r>
-            <a:r>
-              <a:rPr lang="ru-RU" sz="1400" dirty="0">
-                <a:solidFill>
-                  <a:schemeClr val="tx1"/>
-                </a:solidFill>
-              </a:rPr>
-              <a:t>моделей для проекта</a:t>
-            </a:r>
-          </a:p>
-        </p:txBody>
-      </p:sp>
-      <p:sp>
-        <p:nvSpPr>
-          <p:cNvPr id="27" name="Rounded Rectangle 26">
-            <a:extLst>
-              <a:ext uri="{FF2B5EF4-FFF2-40B4-BE49-F238E27FC236}">
-                <a16:creationId xmlns:a16="http://schemas.microsoft.com/office/drawing/2014/main" id="{612C9734-FC8F-C24C-940E-4BD2B5FA68F3}"/>
-              </a:ext>
-            </a:extLst>
-          </p:cNvPr>
-          <p:cNvSpPr/>
-          <p:nvPr/>
-        </p:nvSpPr>
-        <p:spPr>
-          <a:xfrm>
-            <a:off x="2225089" y="1701782"/>
-            <a:ext cx="5356225" cy="396240"/>
-          </a:xfrm>
-          <a:prstGeom prst="roundRect">
-            <a:avLst/>
-          </a:prstGeom>
-          <a:solidFill>
-            <a:srgbClr val="FFD966"/>
-          </a:solidFill>
-          <a:ln>
-            <a:noFill/>
-          </a:ln>
-          <a:effectLst>
-            <a:glow rad="139700">
-              <a:schemeClr val="accent1">
-                <a:satMod val="175000"/>
-                <a:alpha val="40000"/>
-              </a:schemeClr>
-            </a:glow>
-          </a:effectLst>
-        </p:spPr>
-        <p:style>
-          <a:lnRef idx="2">
-            <a:schemeClr val="accent1">
-              <a:shade val="50000"/>
-            </a:schemeClr>
-          </a:lnRef>
-          <a:fillRef idx="1">
-            <a:schemeClr val="accent1"/>
-          </a:fillRef>
-          <a:effectRef idx="0">
-            <a:schemeClr val="accent1"/>
-          </a:effectRef>
-          <a:fontRef idx="minor">
-            <a:schemeClr val="lt1"/>
-          </a:fontRef>
-        </p:style>
-        <p:txBody>
-          <a:bodyPr rtlCol="0" anchor="ctr"/>
-          <a:lstStyle/>
-          <a:p>
-            <a:pPr algn="l"/>
-            <a:r>
-              <a:rPr lang="ru-RU" sz="1400" dirty="0">
-                <a:solidFill>
-                  <a:schemeClr val="tx1"/>
-                </a:solidFill>
-              </a:rPr>
               <a:t>Планирование и разработка проекта</a:t>
             </a:r>
           </a:p>
@@ -5786,49 +5704,6 @@
           <a:xfrm rot="16200000" flipH="1">
             <a:off x="1921319" y="1596132"/>
             <a:ext cx="268238" cy="339302"/>
-          </a:xfrm>
-          <a:prstGeom prst="bentConnector2">
-            <a:avLst/>
-          </a:prstGeom>
-          <a:ln>
-            <a:tailEnd type="triangle"/>
-          </a:ln>
-        </p:spPr>
-        <p:style>
-          <a:lnRef idx="1">
-            <a:schemeClr val="dk1"/>
-          </a:lnRef>
-          <a:fillRef idx="0">
-            <a:schemeClr val="dk1"/>
-          </a:fillRef>
-          <a:effectRef idx="0">
-            <a:schemeClr val="dk1"/>
-          </a:effectRef>
-          <a:fontRef idx="minor">
-            <a:schemeClr val="tx1"/>
-          </a:fontRef>
-        </p:style>
-      </p:cxnSp>
-      <p:cxnSp>
-        <p:nvCxnSpPr>
-          <p:cNvPr id="29" name="Elbow Connector 28">
-            <a:extLst>
-              <a:ext uri="{FF2B5EF4-FFF2-40B4-BE49-F238E27FC236}">
-                <a16:creationId xmlns:a16="http://schemas.microsoft.com/office/drawing/2014/main" id="{892DAF46-096B-324F-B3B3-A6787F8D1DFE}"/>
-              </a:ext>
-            </a:extLst>
-          </p:cNvPr>
-          <p:cNvCxnSpPr>
-            <a:cxnSpLocks/>
-            <a:stCxn id="14" idx="2"/>
-            <a:endCxn id="26" idx="1"/>
-          </p:cNvCxnSpPr>
-          <p:nvPr/>
-        </p:nvCxnSpPr>
-        <p:spPr>
-          <a:xfrm rot="16200000" flipH="1">
-            <a:off x="1635776" y="1881674"/>
-            <a:ext cx="839323" cy="339301"/>
           </a:xfrm>
           <a:prstGeom prst="bentConnector2">
             <a:avLst/>
@@ -5870,8 +5745,8 @@
         </p:nvCxnSpPr>
         <p:spPr>
           <a:xfrm rot="16200000" flipH="1">
-            <a:off x="1096222" y="2421229"/>
-            <a:ext cx="1918431" cy="339300"/>
+            <a:off x="1201912" y="2315539"/>
+            <a:ext cx="1707050" cy="339300"/>
           </a:xfrm>
           <a:prstGeom prst="bentConnector2">
             <a:avLst/>
@@ -5952,7 +5827,7 @@
         </p:nvSpPr>
         <p:spPr>
           <a:xfrm>
-            <a:off x="2225087" y="2843951"/>
+            <a:off x="2225087" y="2421188"/>
             <a:ext cx="5356225" cy="396240"/>
           </a:xfrm>
           <a:prstGeom prst="roundRect">
@@ -6015,8 +5890,8 @@
         </p:nvCxnSpPr>
         <p:spPr>
           <a:xfrm rot="16200000" flipH="1">
-            <a:off x="1350234" y="2167217"/>
-            <a:ext cx="1410407" cy="339300"/>
+            <a:off x="1561615" y="1955836"/>
+            <a:ext cx="987644" cy="339300"/>
           </a:xfrm>
           <a:prstGeom prst="bentConnector2">
             <a:avLst/>
@@ -6042,90 +5917,6 @@
       </p:cxnSp>
       <p:sp>
         <p:nvSpPr>
-          <p:cNvPr id="33" name="object 20">
-            <a:extLst>
-              <a:ext uri="{FF2B5EF4-FFF2-40B4-BE49-F238E27FC236}">
-                <a16:creationId xmlns:a16="http://schemas.microsoft.com/office/drawing/2014/main" id="{3D488BA4-8866-3346-8D85-02959C3E2194}"/>
-              </a:ext>
-            </a:extLst>
-          </p:cNvPr>
-          <p:cNvSpPr txBox="1"/>
-          <p:nvPr/>
-        </p:nvSpPr>
-        <p:spPr>
-          <a:xfrm>
-            <a:off x="1233719" y="2333812"/>
-            <a:ext cx="526415" cy="228268"/>
-          </a:xfrm>
-          <a:prstGeom prst="rect">
-            <a:avLst/>
-          </a:prstGeom>
-        </p:spPr>
-        <p:txBody>
-          <a:bodyPr vert="horz" wrap="square" lIns="0" tIns="12700" rIns="0" bIns="0" rtlCol="0">
-            <a:spAutoFit/>
-          </a:bodyPr>
-          <a:lstStyle/>
-          <a:p>
-            <a:pPr marL="12700">
-              <a:lnSpc>
-                <a:spcPct val="100000"/>
-              </a:lnSpc>
-              <a:spcBef>
-                <a:spcPts val="100"/>
-              </a:spcBef>
-            </a:pPr>
-            <a:r>
-              <a:rPr lang="ru-RU" sz="1400" dirty="0">
-                <a:latin typeface="Calibri"/>
-                <a:cs typeface="Calibri"/>
-              </a:rPr>
-              <a:t>03</a:t>
-            </a:r>
-            <a:r>
-              <a:rPr sz="1400" dirty="0">
-                <a:latin typeface="Calibri"/>
-                <a:cs typeface="Calibri"/>
-              </a:rPr>
-              <a:t>.</a:t>
-            </a:r>
-            <a:r>
-              <a:rPr lang="en-US" sz="1400" dirty="0">
-                <a:latin typeface="Calibri"/>
-                <a:cs typeface="Calibri"/>
-              </a:rPr>
-              <a:t>0</a:t>
-            </a:r>
-            <a:r>
-              <a:rPr lang="ru-RU" sz="1400" dirty="0">
-                <a:latin typeface="Calibri"/>
-                <a:cs typeface="Calibri"/>
-              </a:rPr>
-              <a:t>6</a:t>
-            </a:r>
-            <a:r>
-              <a:rPr sz="1400" spc="-40" dirty="0">
-                <a:latin typeface="Calibri"/>
-                <a:cs typeface="Calibri"/>
-              </a:rPr>
-              <a:t> </a:t>
-            </a:r>
-            <a:r>
-              <a:rPr sz="1400" spc="-50" dirty="0">
-                <a:latin typeface="Calibri"/>
-                <a:cs typeface="Calibri"/>
-              </a:rPr>
-              <a:t>-</a:t>
-            </a:r>
-            <a:endParaRPr sz="1400" dirty="0">
-              <a:latin typeface="Calibri"/>
-              <a:cs typeface="Calibri"/>
-            </a:endParaRPr>
-          </a:p>
-        </p:txBody>
-      </p:sp>
-      <p:sp>
-        <p:nvSpPr>
           <p:cNvPr id="21" name="object 20">
             <a:extLst>
               <a:ext uri="{FF2B5EF4-FFF2-40B4-BE49-F238E27FC236}">
@@ -6138,7 +5929,7 @@
         </p:nvSpPr>
         <p:spPr>
           <a:xfrm>
-            <a:off x="1233718" y="2927937"/>
+            <a:off x="1233717" y="2485188"/>
             <a:ext cx="652066" cy="228268"/>
           </a:xfrm>
           <a:prstGeom prst="rect">
@@ -6167,7 +5958,7 @@
                 <a:latin typeface="Calibri"/>
                 <a:cs typeface="Calibri"/>
               </a:rPr>
-              <a:t>19</a:t>
+              <a:t>11</a:t>
             </a:r>
             <a:r>
               <a:rPr sz="1400" b="1" dirty="0">
@@ -6180,24 +5971,14 @@
               <a:t>.</a:t>
             </a:r>
             <a:r>
-              <a:rPr lang="en-US" sz="1400" b="1" dirty="0">
+              <a:rPr lang="ru-RU" sz="1400" b="1" dirty="0">
                 <a:solidFill>
                   <a:srgbClr val="FF0000"/>
                 </a:solidFill>
                 <a:latin typeface="Calibri"/>
                 <a:cs typeface="Calibri"/>
               </a:rPr>
-              <a:t>0</a:t>
-            </a:r>
-            <a:r>
-              <a:rPr lang="ru-RU" sz="1400" b="1" dirty="0">
-                <a:solidFill>
-                  <a:srgbClr val="FF0000"/>
-                </a:solidFill>
-                <a:latin typeface="Calibri"/>
-                <a:cs typeface="Calibri"/>
-              </a:rPr>
-              <a:t>6</a:t>
+              <a:t>11</a:t>
             </a:r>
             <a:r>
               <a:rPr sz="1400" b="1" spc="-40" dirty="0">
@@ -6253,7 +6034,7 @@
         </p:nvSpPr>
         <p:spPr>
           <a:xfrm>
-            <a:off x="1233717" y="3434129"/>
+            <a:off x="1233717" y="3204594"/>
             <a:ext cx="652066" cy="228268"/>
           </a:xfrm>
           <a:prstGeom prst="rect">
@@ -6305,24 +6086,14 @@
               <a:t>.</a:t>
             </a:r>
             <a:r>
-              <a:rPr lang="en-US" sz="1400" b="1" dirty="0">
+              <a:rPr lang="ru-RU" sz="1400" b="1" dirty="0">
                 <a:solidFill>
                   <a:srgbClr val="FF0000"/>
                 </a:solidFill>
                 <a:latin typeface="Calibri"/>
                 <a:cs typeface="Calibri"/>
               </a:rPr>
-              <a:t>0</a:t>
-            </a:r>
-            <a:r>
-              <a:rPr lang="ru-RU" sz="1400" b="1" dirty="0">
-                <a:solidFill>
-                  <a:srgbClr val="FF0000"/>
-                </a:solidFill>
-                <a:latin typeface="Calibri"/>
-                <a:cs typeface="Calibri"/>
-              </a:rPr>
-              <a:t>6</a:t>
+              <a:t>11</a:t>
             </a:r>
             <a:r>
               <a:rPr sz="1400" b="1" spc="-40" dirty="0">
@@ -6508,7 +6279,7 @@
                   <a:srgbClr val="1E1F21"/>
                 </a:solidFill>
               </a:rPr>
-              <a:t>Технический анализ – предварительная оценка идеи;</a:t>
+              <a:t>Предварительная оценка идеи (для торгового робота – технический анализ);</a:t>
             </a:r>
           </a:p>
           <a:p>
@@ -7652,7 +7423,7 @@
             <a:pPr rtl="0"/>
             <a:r>
               <a:rPr lang="ru-RU" sz="1150" kern="0" dirty="0"/>
-              <a:t>Более 15 лет занимался прикладной математикой и мат моделированием</a:t>
+              <a:t>Более 20 лет занимался прикладной математикой и мат моделированием</a:t>
             </a:r>
           </a:p>
           <a:p>
@@ -7667,7 +7438,7 @@
             </a:r>
             <a:r>
               <a:rPr lang="ru-RU" sz="1150" kern="0" dirty="0"/>
-              <a:t>С++) в НИИ ПАО Газпром</a:t>
+              <a:t>С++)</a:t>
             </a:r>
           </a:p>
           <a:p>
@@ -9557,7 +9328,7 @@
             </a:r>
             <a:r>
               <a:rPr lang="ru" sz="1150" dirty="0"/>
-              <a:t>олее 15 лет занимался прикладной математикой и мат моделированием</a:t>
+              <a:t>олее 20 лет занимался прикладной математикой и мат моделированием</a:t>
             </a:r>
           </a:p>
           <a:p>
@@ -12780,7 +12551,7 @@
             </a:pPr>
             <a:r>
               <a:rPr lang="ru" dirty="0"/>
-              <a:t>Что должно быть в проекте</a:t>
+              <a:t>Стандартный проект – торговый робот</a:t>
             </a:r>
             <a:endParaRPr dirty="0"/>
           </a:p>

--- a/FinML/Course-project/Course project.pptx
+++ b/FinML/Course-project/Course project.pptx
@@ -130,7 +130,7 @@
           <a:p>
             <a:fld id="{CED1C788-56A1-2E45-A024-5C42A74F7F0E}" type="datetimeFigureOut">
               <a:rPr lang="en-US" smtClean="0"/>
-              <a:t>10/2/25</a:t>
+              <a:t>2/12/26</a:t>
             </a:fld>
             <a:endParaRPr lang="en-US"/>
           </a:p>
@@ -1990,7 +1990,7 @@
           <a:p>
             <a:fld id="{1D8BD707-D9CF-40AE-B4C6-C98DA3205C09}" type="datetimeFigureOut">
               <a:rPr lang="en-US"/>
-              <a:t>10/2/25</a:t>
+              <a:t>2/12/26</a:t>
             </a:fld>
             <a:endParaRPr lang="en-US"/>
           </a:p>
@@ -2167,7 +2167,7 @@
           <a:p>
             <a:fld id="{1D8BD707-D9CF-40AE-B4C6-C98DA3205C09}" type="datetimeFigureOut">
               <a:rPr lang="en-US"/>
-              <a:t>10/2/25</a:t>
+              <a:t>2/12/26</a:t>
             </a:fld>
             <a:endParaRPr lang="en-US"/>
           </a:p>
@@ -2393,7 +2393,7 @@
           <a:p>
             <a:fld id="{1D8BD707-D9CF-40AE-B4C6-C98DA3205C09}" type="datetimeFigureOut">
               <a:rPr lang="en-US"/>
-              <a:t>10/2/25</a:t>
+              <a:t>2/12/26</a:t>
             </a:fld>
             <a:endParaRPr lang="en-US"/>
           </a:p>
@@ -2571,7 +2571,7 @@
           <a:p>
             <a:fld id="{1D8BD707-D9CF-40AE-B4C6-C98DA3205C09}" type="datetimeFigureOut">
               <a:rPr lang="en-US"/>
-              <a:t>10/2/25</a:t>
+              <a:t>2/12/26</a:t>
             </a:fld>
             <a:endParaRPr lang="en-US"/>
           </a:p>
@@ -2690,7 +2690,7 @@
           <a:p>
             <a:fld id="{1D8BD707-D9CF-40AE-B4C6-C98DA3205C09}" type="datetimeFigureOut">
               <a:rPr lang="en-US"/>
-              <a:t>10/2/25</a:t>
+              <a:t>2/12/26</a:t>
             </a:fld>
             <a:endParaRPr lang="en-US"/>
           </a:p>
@@ -4842,7 +4842,7 @@
           <a:p>
             <a:fld id="{1D8BD707-D9CF-40AE-B4C6-C98DA3205C09}" type="datetimeFigureOut">
               <a:rPr lang="en-US"/>
-              <a:t>10/2/25</a:t>
+              <a:t>2/12/26</a:t>
             </a:fld>
             <a:endParaRPr lang="en-US"/>
           </a:p>
@@ -5279,11 +5279,18 @@
               </a:spcBef>
             </a:pPr>
             <a:r>
+              <a:rPr lang="en-US" sz="1400" dirty="0">
+                <a:latin typeface="Calibri"/>
+                <a:cs typeface="Calibri"/>
+              </a:rPr>
+              <a:t>1</a:t>
+            </a:r>
+            <a:r>
               <a:rPr lang="ru-RU" sz="1400" dirty="0">
                 <a:latin typeface="Calibri"/>
                 <a:cs typeface="Calibri"/>
               </a:rPr>
-              <a:t>02</a:t>
+              <a:t>2</a:t>
             </a:r>
             <a:r>
               <a:rPr sz="1400" dirty="0">
@@ -5293,18 +5300,11 @@
               <a:t>.</a:t>
             </a:r>
             <a:r>
-              <a:rPr lang="ru-RU" sz="1400" dirty="0">
-                <a:latin typeface="Calibri"/>
-                <a:cs typeface="Calibri"/>
-              </a:rPr>
-              <a:t>1</a:t>
-            </a:r>
-            <a:r>
               <a:rPr lang="en-US" sz="1400" dirty="0">
                 <a:latin typeface="Calibri"/>
                 <a:cs typeface="Calibri"/>
               </a:rPr>
-              <a:t>0</a:t>
+              <a:t>02</a:t>
             </a:r>
             <a:r>
               <a:rPr sz="1400" spc="-40" dirty="0">
@@ -5363,11 +5363,11 @@
               </a:spcBef>
             </a:pPr>
             <a:r>
-              <a:rPr lang="ru-RU" sz="1400" dirty="0">
+              <a:rPr lang="en-US" sz="1400" dirty="0">
                 <a:latin typeface="Calibri"/>
                 <a:cs typeface="Calibri"/>
               </a:rPr>
-              <a:t>02</a:t>
+              <a:t>13</a:t>
             </a:r>
             <a:r>
               <a:rPr sz="1400" dirty="0">
@@ -5377,11 +5377,11 @@
               <a:t>.</a:t>
             </a:r>
             <a:r>
-              <a:rPr lang="ru-RU" sz="1400" dirty="0">
+              <a:rPr lang="en-US" sz="1400" dirty="0">
                 <a:latin typeface="Calibri"/>
                 <a:cs typeface="Calibri"/>
               </a:rPr>
-              <a:t>12</a:t>
+              <a:t>04</a:t>
             </a:r>
             <a:r>
               <a:rPr sz="1400" spc="-35" dirty="0">
@@ -5958,7 +5958,7 @@
                 <a:latin typeface="Calibri"/>
                 <a:cs typeface="Calibri"/>
               </a:rPr>
-              <a:t>11</a:t>
+              <a:t>26</a:t>
             </a:r>
             <a:r>
               <a:rPr sz="1400" b="1" dirty="0">
@@ -5978,7 +5978,7 @@
                 <a:latin typeface="Calibri"/>
                 <a:cs typeface="Calibri"/>
               </a:rPr>
-              <a:t>11</a:t>
+              <a:t>03</a:t>
             </a:r>
             <a:r>
               <a:rPr sz="1400" b="1" spc="-40" dirty="0">
@@ -6063,37 +6063,27 @@
                 <a:latin typeface="Calibri"/>
                 <a:cs typeface="Calibri"/>
               </a:rPr>
-              <a:t>2</a:t>
-            </a:r>
-            <a:r>
-              <a:rPr lang="ru-RU" sz="1400" b="1" dirty="0">
+              <a:t>08</a:t>
+            </a:r>
+            <a:r>
+              <a:rPr sz="1400" b="1" dirty="0">
                 <a:solidFill>
                   <a:srgbClr val="FF0000"/>
                 </a:solidFill>
                 <a:latin typeface="Calibri"/>
                 <a:cs typeface="Calibri"/>
               </a:rPr>
-              <a:t>5</a:t>
-            </a:r>
-            <a:r>
-              <a:rPr sz="1400" b="1" dirty="0">
+              <a:t>.</a:t>
+            </a:r>
+            <a:r>
+              <a:rPr lang="en-US" sz="1400" b="1" dirty="0">
                 <a:solidFill>
                   <a:srgbClr val="FF0000"/>
                 </a:solidFill>
                 <a:latin typeface="Calibri"/>
                 <a:cs typeface="Calibri"/>
               </a:rPr>
-              <a:t>.</a:t>
-            </a:r>
-            <a:r>
-              <a:rPr lang="ru-RU" sz="1400" b="1" dirty="0">
-                <a:solidFill>
-                  <a:srgbClr val="FF0000"/>
-                </a:solidFill>
-                <a:latin typeface="Calibri"/>
-                <a:cs typeface="Calibri"/>
-              </a:rPr>
-              <a:t>11</a:t>
+              <a:t>04</a:t>
             </a:r>
             <a:r>
               <a:rPr sz="1400" b="1" spc="-40" dirty="0">
